--- a/docs/en/training/staff-guide.pptx
+++ b/docs/en/training/staff-guide.pptx
@@ -1911,7 +1911,7 @@
                 <a:ea typeface="Cambria" pitchFamily="34" charset="-122"/>
                 <a:cs typeface="Cambria" pitchFamily="34" charset="-120"/>
               </a:rPr>
-              <a:t>Khayali</a:t>
+              <a:t>TooniX</a:t>
             </a:r>
             <a:endParaRPr lang="en-US" sz="4400" dirty="0"/>
           </a:p>
@@ -2485,7 +2485,7 @@
                 <a:ea typeface="Calibri" pitchFamily="34" charset="-122"/>
                 <a:cs typeface="Calibri" pitchFamily="34" charset="-120"/>
               </a:rPr>
-              <a:t>Khayali — Staff Guide</a:t>
+              <a:t>TooniX — Staff Guide</a:t>
             </a:r>
             <a:endParaRPr lang="en-US" sz="1000" dirty="0"/>
           </a:p>
@@ -2775,7 +2775,7 @@
                 <a:ea typeface="Calibri" pitchFamily="34" charset="-122"/>
                 <a:cs typeface="Calibri" pitchFamily="34" charset="-120"/>
               </a:rPr>
-              <a:t>Khayali — Staff Guide</a:t>
+              <a:t>TooniX — Staff Guide</a:t>
             </a:r>
             <a:endParaRPr lang="en-US" sz="1000" dirty="0"/>
           </a:p>
@@ -3058,7 +3058,7 @@
                 <a:ea typeface="Cambria" pitchFamily="34" charset="-122"/>
                 <a:cs typeface="Cambria" pitchFamily="34" charset="-120"/>
               </a:rPr>
-              <a:t>What Khayali does for your nursery</a:t>
+              <a:t>What TooniX does for your nursery</a:t>
             </a:r>
             <a:endParaRPr lang="en-US" sz="3200" dirty="0"/>
           </a:p>
@@ -3454,7 +3454,7 @@
                 <a:ea typeface="Calibri" pitchFamily="34" charset="-122"/>
                 <a:cs typeface="Calibri" pitchFamily="34" charset="-120"/>
               </a:rPr>
-              <a:t>Khayali — Staff Guide</a:t>
+              <a:t>TooniX — Staff Guide</a:t>
             </a:r>
             <a:endParaRPr lang="en-US" sz="1000" dirty="0"/>
           </a:p>
@@ -4098,7 +4098,7 @@
                 <a:ea typeface="Calibri" pitchFamily="34" charset="-122"/>
                 <a:cs typeface="Calibri" pitchFamily="34" charset="-120"/>
               </a:rPr>
-              <a:t>Khayali — Staff Guide</a:t>
+              <a:t>TooniX — Staff Guide</a:t>
             </a:r>
             <a:endParaRPr lang="en-US" sz="1000" dirty="0"/>
           </a:p>
@@ -4996,7 +4996,7 @@
                 <a:ea typeface="Calibri" pitchFamily="34" charset="-122"/>
                 <a:cs typeface="Calibri" pitchFamily="34" charset="-120"/>
               </a:rPr>
-              <a:t>Khayali — Staff Guide</a:t>
+              <a:t>TooniX — Staff Guide</a:t>
             </a:r>
             <a:endParaRPr lang="en-US" sz="1000" dirty="0"/>
           </a:p>
@@ -5502,7 +5502,7 @@
                 <a:ea typeface="Calibri" pitchFamily="34" charset="-122"/>
                 <a:cs typeface="Calibri" pitchFamily="34" charset="-120"/>
               </a:rPr>
-              <a:t>Khayali — Staff Guide</a:t>
+              <a:t>TooniX — Staff Guide</a:t>
             </a:r>
             <a:endParaRPr lang="en-US" sz="1000" dirty="0"/>
           </a:p>
@@ -5978,7 +5978,7 @@
                 <a:ea typeface="Calibri" pitchFamily="34" charset="-122"/>
                 <a:cs typeface="Calibri" pitchFamily="34" charset="-120"/>
               </a:rPr>
-              <a:t>Khayali — Staff Guide</a:t>
+              <a:t>TooniX — Staff Guide</a:t>
             </a:r>
             <a:endParaRPr lang="en-US" sz="1000" dirty="0"/>
           </a:p>
@@ -6909,7 +6909,7 @@
                 <a:ea typeface="Calibri" pitchFamily="34" charset="-122"/>
                 <a:cs typeface="Calibri" pitchFamily="34" charset="-120"/>
               </a:rPr>
-              <a:t>Khayali — Staff Guide</a:t>
+              <a:t>TooniX — Staff Guide</a:t>
             </a:r>
             <a:endParaRPr lang="en-US" sz="1000" dirty="0"/>
           </a:p>
@@ -7385,7 +7385,7 @@
                 <a:ea typeface="Calibri" pitchFamily="34" charset="-122"/>
                 <a:cs typeface="Calibri" pitchFamily="34" charset="-120"/>
               </a:rPr>
-              <a:t>Khayali — Staff Guide</a:t>
+              <a:t>TooniX — Staff Guide</a:t>
             </a:r>
             <a:endParaRPr lang="en-US" sz="1000" dirty="0"/>
           </a:p>
@@ -7795,7 +7795,7 @@
                 <a:ea typeface="Calibri" pitchFamily="34" charset="-122"/>
                 <a:cs typeface="Calibri" pitchFamily="34" charset="-120"/>
               </a:rPr>
-              <a:t>Khayali — Staff Guide</a:t>
+              <a:t>TooniX — Staff Guide</a:t>
             </a:r>
             <a:endParaRPr lang="en-US" sz="1000" dirty="0"/>
           </a:p>

--- a/docs/en/training/staff-guide.pptx
+++ b/docs/en/training/staff-guide.pptx
@@ -1911,7 +1911,7 @@
                 <a:ea typeface="Cambria" pitchFamily="34" charset="-122"/>
                 <a:cs typeface="Cambria" pitchFamily="34" charset="-120"/>
               </a:rPr>
-              <a:t>TooniX</a:t>
+              <a:t>Ownly</a:t>
             </a:r>
             <a:endParaRPr lang="en-US" sz="4400" dirty="0"/>
           </a:p>
@@ -2485,7 +2485,7 @@
                 <a:ea typeface="Calibri" pitchFamily="34" charset="-122"/>
                 <a:cs typeface="Calibri" pitchFamily="34" charset="-120"/>
               </a:rPr>
-              <a:t>TooniX — Staff Guide</a:t>
+              <a:t>Ownly — Staff Guide</a:t>
             </a:r>
             <a:endParaRPr lang="en-US" sz="1000" dirty="0"/>
           </a:p>
@@ -2775,7 +2775,7 @@
                 <a:ea typeface="Calibri" pitchFamily="34" charset="-122"/>
                 <a:cs typeface="Calibri" pitchFamily="34" charset="-120"/>
               </a:rPr>
-              <a:t>TooniX — Staff Guide</a:t>
+              <a:t>Ownly — Staff Guide</a:t>
             </a:r>
             <a:endParaRPr lang="en-US" sz="1000" dirty="0"/>
           </a:p>
@@ -3058,7 +3058,7 @@
                 <a:ea typeface="Cambria" pitchFamily="34" charset="-122"/>
                 <a:cs typeface="Cambria" pitchFamily="34" charset="-120"/>
               </a:rPr>
-              <a:t>What TooniX does for your nursery</a:t>
+              <a:t>What Ownly does for your nursery</a:t>
             </a:r>
             <a:endParaRPr lang="en-US" sz="3200" dirty="0"/>
           </a:p>
@@ -3454,7 +3454,7 @@
                 <a:ea typeface="Calibri" pitchFamily="34" charset="-122"/>
                 <a:cs typeface="Calibri" pitchFamily="34" charset="-120"/>
               </a:rPr>
-              <a:t>TooniX — Staff Guide</a:t>
+              <a:t>Ownly — Staff Guide</a:t>
             </a:r>
             <a:endParaRPr lang="en-US" sz="1000" dirty="0"/>
           </a:p>
@@ -4098,7 +4098,7 @@
                 <a:ea typeface="Calibri" pitchFamily="34" charset="-122"/>
                 <a:cs typeface="Calibri" pitchFamily="34" charset="-120"/>
               </a:rPr>
-              <a:t>TooniX — Staff Guide</a:t>
+              <a:t>Ownly — Staff Guide</a:t>
             </a:r>
             <a:endParaRPr lang="en-US" sz="1000" dirty="0"/>
           </a:p>
@@ -4996,7 +4996,7 @@
                 <a:ea typeface="Calibri" pitchFamily="34" charset="-122"/>
                 <a:cs typeface="Calibri" pitchFamily="34" charset="-120"/>
               </a:rPr>
-              <a:t>TooniX — Staff Guide</a:t>
+              <a:t>Ownly — Staff Guide</a:t>
             </a:r>
             <a:endParaRPr lang="en-US" sz="1000" dirty="0"/>
           </a:p>
@@ -5502,7 +5502,7 @@
                 <a:ea typeface="Calibri" pitchFamily="34" charset="-122"/>
                 <a:cs typeface="Calibri" pitchFamily="34" charset="-120"/>
               </a:rPr>
-              <a:t>TooniX — Staff Guide</a:t>
+              <a:t>Ownly — Staff Guide</a:t>
             </a:r>
             <a:endParaRPr lang="en-US" sz="1000" dirty="0"/>
           </a:p>
@@ -5978,7 +5978,7 @@
                 <a:ea typeface="Calibri" pitchFamily="34" charset="-122"/>
                 <a:cs typeface="Calibri" pitchFamily="34" charset="-120"/>
               </a:rPr>
-              <a:t>TooniX — Staff Guide</a:t>
+              <a:t>Ownly — Staff Guide</a:t>
             </a:r>
             <a:endParaRPr lang="en-US" sz="1000" dirty="0"/>
           </a:p>
@@ -6909,7 +6909,7 @@
                 <a:ea typeface="Calibri" pitchFamily="34" charset="-122"/>
                 <a:cs typeface="Calibri" pitchFamily="34" charset="-120"/>
               </a:rPr>
-              <a:t>TooniX — Staff Guide</a:t>
+              <a:t>Ownly — Staff Guide</a:t>
             </a:r>
             <a:endParaRPr lang="en-US" sz="1000" dirty="0"/>
           </a:p>
@@ -7385,7 +7385,7 @@
                 <a:ea typeface="Calibri" pitchFamily="34" charset="-122"/>
                 <a:cs typeface="Calibri" pitchFamily="34" charset="-120"/>
               </a:rPr>
-              <a:t>TooniX — Staff Guide</a:t>
+              <a:t>Ownly — Staff Guide</a:t>
             </a:r>
             <a:endParaRPr lang="en-US" sz="1000" dirty="0"/>
           </a:p>
@@ -7795,7 +7795,7 @@
                 <a:ea typeface="Calibri" pitchFamily="34" charset="-122"/>
                 <a:cs typeface="Calibri" pitchFamily="34" charset="-120"/>
               </a:rPr>
-              <a:t>TooniX — Staff Guide</a:t>
+              <a:t>Ownly — Staff Guide</a:t>
             </a:r>
             <a:endParaRPr lang="en-US" sz="1000" dirty="0"/>
           </a:p>
